--- a/Quadro_Aulas_Report_2026-07-13.pptx
+++ b/Quadro_Aulas_Report_2026-07-13.pptx
@@ -1038,7 +1038,7 @@
                   <a:srgbClr val="8FA3C0"/>
                 </a:solidFill>
               </a:rPr>
-              <a:t>13 de Julho de 2026 as 08:26</a:t>
+              <a:t>13 de Julho de 2026 as 18:35</a:t>
             </a:r>
             <a:endParaRPr lang="en-US" sz="700" dirty="0"/>
           </a:p>
@@ -1207,7 +1207,7 @@
                   <a:srgbClr val="4ADE80"/>
                 </a:solidFill>
               </a:rPr>
-              <a:t>335</a:t>
+              <a:t>338</a:t>
             </a:r>
             <a:endParaRPr lang="en-US" sz="2400" dirty="0"/>
           </a:p>
@@ -1279,7 +1279,7 @@
                   <a:srgbClr val="FCD34D"/>
                 </a:solidFill>
               </a:rPr>
-              <a:t>7</a:t>
+              <a:t>6</a:t>
             </a:r>
             <a:endParaRPr lang="en-US" sz="2400" dirty="0"/>
           </a:p>
@@ -1351,7 +1351,7 @@
                   <a:srgbClr val="F87171"/>
                 </a:solidFill>
               </a:rPr>
-              <a:t>34</a:t>
+              <a:t>31</a:t>
             </a:r>
             <a:endParaRPr lang="en-US" sz="2400" dirty="0"/>
           </a:p>
@@ -1427,7 +1427,7 @@
         <p:spPr>
           <a:xfrm>
             <a:off x="137160" y="3538728"/>
-            <a:ext cx="1748790" cy="91440"/>
+            <a:ext cx="1769364" cy="91440"/>
           </a:xfrm>
           <a:prstGeom prst="rect">
             <a:avLst/>
@@ -1473,7 +1473,7 @@
                   <a:srgbClr val="8FA3C0"/>
                 </a:solidFill>
               </a:rPr>
-              <a:t>85% concluido  .  335 de 394 itens</a:t>
+              <a:t>86% concluido  .  338 de 394 itens</a:t>
             </a:r>
             <a:endParaRPr lang="en-US" sz="700" dirty="0"/>
           </a:p>
@@ -2263,7 +2263,7 @@
                   <a:srgbClr val="222222"/>
                 </a:solidFill>
               </a:rPr>
-              <a:t>A Fazer: 4 . Em progresso: 0 . Finalizados: 110</a:t>
+              <a:t>A Fazer: 2 . Em progresso: 1 . Finalizados: 111</a:t>
             </a:r>
             <a:endParaRPr lang="en-US" sz="750" dirty="0"/>
           </a:p>
@@ -2299,7 +2299,7 @@
                   <a:srgbClr val="222222"/>
                 </a:solidFill>
               </a:rPr>
-              <a:t>Est: 432.5h . Real: 591.1h . Rem: 8h</a:t>
+              <a:t>Est: 432.5h . Real: 592.1h . Rem: 7h</a:t>
             </a:r>
             <a:endParaRPr lang="en-US" sz="750" dirty="0"/>
           </a:p>
@@ -2425,7 +2425,7 @@
         <p:spPr>
           <a:xfrm>
             <a:off x="4946904" y="1033272"/>
-            <a:ext cx="2115556" cy="50292"/>
+            <a:ext cx="2137593" cy="50292"/>
           </a:xfrm>
           <a:prstGeom prst="rect">
             <a:avLst/>
@@ -2471,7 +2471,7 @@
                   <a:srgbClr val="888888"/>
                 </a:solidFill>
               </a:rPr>
-              <a:t>Subs: 96% · 110 de 114</a:t>
+              <a:t>Subs: 97% · 111 de 114</a:t>
             </a:r>
             <a:endParaRPr lang="en-US" sz="650" dirty="0"/>
           </a:p>
@@ -3634,7 +3634,7 @@
                   <a:srgbClr val="D97706"/>
                 </a:solidFill>
               </a:rPr>
-              <a:t>1331.9h</a:t>
+              <a:t>1347.9h</a:t>
             </a:r>
             <a:endParaRPr lang="en-US" sz="2400" dirty="0"/>
           </a:p>
@@ -3767,7 +3767,7 @@
                   <a:srgbClr val="F87171"/>
                 </a:solidFill>
               </a:rPr>
-              <a:t>120h</a:t>
+              <a:t>119h</a:t>
             </a:r>
             <a:endParaRPr lang="en-US" sz="2400" dirty="0"/>
           </a:p>
@@ -3900,7 +3900,7 @@
                   <a:srgbClr val="D97706"/>
                 </a:solidFill>
               </a:rPr>
-              <a:t>+202.9h</a:t>
+              <a:t>+217.9h</a:t>
             </a:r>
             <a:endParaRPr lang="en-US" sz="2400" dirty="0"/>
           </a:p>
@@ -3936,7 +3936,7 @@
                   <a:srgbClr val="888888"/>
                 </a:solidFill>
               </a:rPr>
-              <a:t>projetado: 1451.9h (+16%)</a:t>
+              <a:t>projetado: 1466.9h (+17%)</a:t>
             </a:r>
             <a:endParaRPr lang="en-US" sz="700" dirty="0"/>
           </a:p>
@@ -3951,7 +3951,7 @@
         <p:spPr>
           <a:xfrm>
             <a:off x="2441448" y="2916936"/>
-            <a:ext cx="8849599" cy="54864"/>
+            <a:ext cx="8864328" cy="54864"/>
           </a:xfrm>
           <a:prstGeom prst="rect">
             <a:avLst/>
@@ -3975,8 +3975,8 @@
         </p:nvSpPr>
         <p:spPr>
           <a:xfrm>
-            <a:off x="11291047" y="2916936"/>
-            <a:ext cx="797321" cy="54864"/>
+            <a:off x="11305776" y="2916936"/>
+            <a:ext cx="782592" cy="54864"/>
           </a:xfrm>
           <a:prstGeom prst="rect">
             <a:avLst/>
@@ -4117,7 +4117,7 @@
                   <a:srgbClr val="0F6E56"/>
                 </a:solidFill>
               </a:rPr>
-              <a:t>97% concluido</a:t>
+              <a:t>98% concluido</a:t>
             </a:r>
             <a:endParaRPr lang="en-US" sz="650" dirty="0"/>
           </a:p>
@@ -4157,7 +4157,7 @@
         <p:spPr>
           <a:xfrm>
             <a:off x="2551176" y="3291840"/>
-            <a:ext cx="4421535" cy="64008"/>
+            <a:ext cx="4467118" cy="64008"/>
           </a:xfrm>
           <a:prstGeom prst="rect">
             <a:avLst/>
@@ -5034,7 +5034,7 @@
                   <a:srgbClr val="D85A30"/>
                 </a:solidFill>
               </a:rPr>
-              <a:t>17.9%</a:t>
+              <a:t>17.8%</a:t>
             </a:r>
             <a:endParaRPr lang="en-US" sz="2200" dirty="0"/>
           </a:p>
@@ -5167,7 +5167,7 @@
                   <a:srgbClr val="534AB7"/>
                 </a:solidFill>
               </a:rPr>
-              <a:t>11.1%</a:t>
+              <a:t>11.0%</a:t>
             </a:r>
             <a:endParaRPr lang="en-US" sz="2200" dirty="0"/>
           </a:p>
@@ -5297,10 +5297,10 @@
             <a:r>
               <a:rPr lang="en-US" sz="2200" b="1" dirty="0">
                 <a:solidFill>
-                  <a:srgbClr val="DC2626"/>
-                </a:solidFill>
-              </a:rPr>
-              <a:t>32</a:t>
+                  <a:srgbClr val="D97706"/>
+                </a:solidFill>
+              </a:rPr>
+              <a:t>35</a:t>
             </a:r>
             <a:endParaRPr lang="en-US" sz="2200" dirty="0"/>
           </a:p>
@@ -5372,7 +5372,7 @@
                   <a:srgbClr val="888888"/>
                 </a:solidFill>
               </a:rPr>
-              <a:t>fixes sem card no Git · 48% do time com card</a:t>
+              <a:t>fixes sem card no Git · 50% do time com card</a:t>
             </a:r>
             <a:endParaRPr lang="en-US" sz="700" dirty="0"/>
           </a:p>
@@ -5433,7 +5433,7 @@
                   <a:srgbClr val="1D9E75"/>
                 </a:solidFill>
               </a:rPr>
-              <a:t>82.1%</a:t>
+              <a:t>82.2%</a:t>
             </a:r>
             <a:endParaRPr lang="en-US" sz="2200" dirty="0"/>
           </a:p>
@@ -6722,7 +6722,7 @@
                   <a:srgbClr val="D97706"/>
                 </a:solidFill>
               </a:rPr>
-              <a:t>245.6h · 44 subs finalizadas</a:t>
+              <a:t>246.6h · 45 subs finalizadas</a:t>
             </a:r>
             <a:endParaRPr lang="en-US" sz="950" dirty="0"/>
           </a:p>
@@ -6758,7 +6758,7 @@
                   <a:srgbClr val="888888"/>
                 </a:solidFill>
               </a:rPr>
-              <a:t>214h estimadas</a:t>
+              <a:t>219h estimadas</a:t>
             </a:r>
             <a:endParaRPr lang="en-US" sz="850" dirty="0"/>
           </a:p>
@@ -6819,7 +6819,7 @@
                   <a:srgbClr val="DC2626"/>
                 </a:solidFill>
               </a:rPr>
-              <a:t>⚠ 2 fix(s) sem card</a:t>
+              <a:t>⚠ 5 fix(s) sem card</a:t>
             </a:r>
             <a:endParaRPr lang="en-US" sz="750" dirty="0"/>
           </a:p>
@@ -6973,7 +6973,7 @@
                   <a:srgbClr val="D85A30"/>
                 </a:solidFill>
               </a:rPr>
-              <a:t>356.2h · 53 subs finalizadas</a:t>
+              <a:t>371.2h · 55 subs finalizadas</a:t>
             </a:r>
             <a:endParaRPr lang="en-US" sz="950" dirty="0"/>
           </a:p>
